--- a/ppt/ICU_Trajectory_Watch_5min_general.pptx
+++ b/ppt/ICU_Trajectory_Watch_5min_general.pptx
@@ -5,7 +5,7 @@
     <p:sldMasterId id="2147483648" r:id="rId1"/>
   </p:sldMasterIdLst>
   <p:notesMasterIdLst>
-    <p:notesMasterId r:id="rId9"/>
+    <p:notesMasterId r:id="rId10"/>
   </p:notesMasterIdLst>
   <p:sldIdLst>
     <p:sldId id="265" r:id="rId2"/>
@@ -14,7 +14,8 @@
     <p:sldId id="258" r:id="rId5"/>
     <p:sldId id="259" r:id="rId6"/>
     <p:sldId id="260" r:id="rId7"/>
-    <p:sldId id="263" r:id="rId8"/>
+    <p:sldId id="266" r:id="rId8"/>
+    <p:sldId id="263" r:id="rId9"/>
   </p:sldIdLst>
   <p:sldSz cx="12192000" cy="6858000"/>
   <p:notesSz cx="6858000" cy="9144000"/>
@@ -885,6 +886,89 @@
             <a:spLocks noGrp="1" noRot="1" noChangeAspect="1"/>
           </p:cNvSpPr>
           <p:nvPr>
+            <p:ph type="sldImg"/>
+          </p:nvPr>
+        </p:nvSpPr>
+        <p:spPr>
+          <a:xfrm>
+            <a:off x="685800" y="1143000"/>
+            <a:ext cx="5486400" cy="3086100"/>
+          </a:xfrm>
+          <a:prstGeom prst="rect">
+            <a:avLst/>
+          </a:prstGeom>
+          <a:noFill/>
+          <a:ln w="12700">
+            <a:solidFill>
+              <a:prstClr val="black"/>
+            </a:solidFill>
+          </a:ln>
+        </p:spPr>
+      </p:sp>
+      <p:sp>
+        <p:nvSpPr>
+          <p:cNvPr id="3" name="Notes Placeholder 2"/>
+          <p:cNvSpPr>
+            <a:spLocks noGrp="1"/>
+          </p:cNvSpPr>
+          <p:nvPr>
+            <p:ph type="body" idx="1"/>
+          </p:nvPr>
+        </p:nvSpPr>
+        <p:spPr>
+          <a:xfrm>
+            <a:off x="685800" y="4400550"/>
+            <a:ext cx="5486400" cy="3600450"/>
+          </a:xfrm>
+          <a:prstGeom prst="rect">
+            <a:avLst/>
+          </a:prstGeom>
+        </p:spPr>
+        <p:txBody>
+          <a:bodyPr/>
+          <a:lstStyle/>
+          <a:p>
+            <a:endParaRPr lang="en-US"/>
+          </a:p>
+        </p:txBody>
+      </p:sp>
+    </p:spTree>
+    <p:extLst>
+      <p:ext uri="{BB962C8B-B14F-4D97-AF65-F5344CB8AC3E}">
+        <p14:creationId xmlns:p14="http://schemas.microsoft.com/office/powerpoint/2010/main" val="2477057194"/>
+      </p:ext>
+    </p:extLst>
+  </p:cSld>
+  <p:clrMapOvr>
+    <a:masterClrMapping/>
+  </p:clrMapOvr>
+</p:notes>
+</file>
+
+<file path=ppt/notesSlides/notesSlide8.xml><?xml version="1.0" encoding="utf-8"?>
+<p:notes xmlns:a="http://schemas.openxmlformats.org/drawingml/2006/main" xmlns:r="http://schemas.openxmlformats.org/officeDocument/2006/relationships" xmlns:p="http://schemas.openxmlformats.org/presentationml/2006/main">
+  <p:cSld>
+    <p:spTree>
+      <p:nvGrpSpPr>
+        <p:cNvPr id="1" name=""/>
+        <p:cNvGrpSpPr/>
+        <p:nvPr/>
+      </p:nvGrpSpPr>
+      <p:grpSpPr>
+        <a:xfrm>
+          <a:off x="0" y="0"/>
+          <a:ext cx="0" cy="0"/>
+          <a:chOff x="0" y="0"/>
+          <a:chExt cx="0" cy="0"/>
+        </a:xfrm>
+      </p:grpSpPr>
+      <p:sp>
+        <p:nvSpPr>
+          <p:cNvPr id="2" name="Slide Image Placeholder 1"/>
+          <p:cNvSpPr>
+            <a:spLocks noGrp="1" noRot="1" noChangeAspect="1"/>
+          </p:cNvSpPr>
+          <p:nvPr>
             <p:ph type="sldImg" idx="2"/>
           </p:nvPr>
         </p:nvSpPr>
@@ -1251,7 +1335,7 @@
           <a:p>
             <a:fld id="{5BCAD085-E8A6-8845-BD4E-CB4CCA059FC4}" type="datetimeFigureOut">
               <a:rPr lang="en-US" smtClean="0"/>
-              <a:t>8/7/26</a:t>
+              <a:t>8/8/26</a:t>
             </a:fld>
             <a:endParaRPr lang="en-US"/>
           </a:p>
@@ -1419,7 +1503,7 @@
           <a:p>
             <a:fld id="{5BCAD085-E8A6-8845-BD4E-CB4CCA059FC4}" type="datetimeFigureOut">
               <a:rPr lang="en-US" smtClean="0"/>
-              <a:t>8/7/26</a:t>
+              <a:t>8/8/26</a:t>
             </a:fld>
             <a:endParaRPr lang="en-US"/>
           </a:p>
@@ -1597,7 +1681,7 @@
           <a:p>
             <a:fld id="{5BCAD085-E8A6-8845-BD4E-CB4CCA059FC4}" type="datetimeFigureOut">
               <a:rPr lang="en-US" smtClean="0"/>
-              <a:t>8/7/26</a:t>
+              <a:t>8/8/26</a:t>
             </a:fld>
             <a:endParaRPr lang="en-US"/>
           </a:p>
@@ -1800,7 +1884,7 @@
           <a:p>
             <a:fld id="{5BCAD085-E8A6-8845-BD4E-CB4CCA059FC4}" type="datetimeFigureOut">
               <a:rPr lang="en-US" smtClean="0"/>
-              <a:t>8/7/26</a:t>
+              <a:t>8/8/26</a:t>
             </a:fld>
             <a:endParaRPr lang="en-US"/>
           </a:p>
@@ -2045,7 +2129,7 @@
           <a:p>
             <a:fld id="{5BCAD085-E8A6-8845-BD4E-CB4CCA059FC4}" type="datetimeFigureOut">
               <a:rPr lang="en-US" smtClean="0"/>
-              <a:t>8/7/26</a:t>
+              <a:t>8/8/26</a:t>
             </a:fld>
             <a:endParaRPr lang="en-US"/>
           </a:p>
@@ -2330,7 +2414,7 @@
           <a:p>
             <a:fld id="{5BCAD085-E8A6-8845-BD4E-CB4CCA059FC4}" type="datetimeFigureOut">
               <a:rPr lang="en-US" smtClean="0"/>
-              <a:t>8/7/26</a:t>
+              <a:t>8/8/26</a:t>
             </a:fld>
             <a:endParaRPr lang="en-US"/>
           </a:p>
@@ -2749,7 +2833,7 @@
           <a:p>
             <a:fld id="{5BCAD085-E8A6-8845-BD4E-CB4CCA059FC4}" type="datetimeFigureOut">
               <a:rPr lang="en-US" smtClean="0"/>
-              <a:t>8/7/26</a:t>
+              <a:t>8/8/26</a:t>
             </a:fld>
             <a:endParaRPr lang="en-US"/>
           </a:p>
@@ -2866,7 +2950,7 @@
           <a:p>
             <a:fld id="{5BCAD085-E8A6-8845-BD4E-CB4CCA059FC4}" type="datetimeFigureOut">
               <a:rPr lang="en-US" smtClean="0"/>
-              <a:t>8/7/26</a:t>
+              <a:t>8/8/26</a:t>
             </a:fld>
             <a:endParaRPr lang="en-US"/>
           </a:p>
@@ -2961,7 +3045,7 @@
           <a:p>
             <a:fld id="{5BCAD085-E8A6-8845-BD4E-CB4CCA059FC4}" type="datetimeFigureOut">
               <a:rPr lang="en-US" smtClean="0"/>
-              <a:t>8/7/26</a:t>
+              <a:t>8/8/26</a:t>
             </a:fld>
             <a:endParaRPr lang="en-US"/>
           </a:p>
@@ -3236,7 +3320,7 @@
           <a:p>
             <a:fld id="{5BCAD085-E8A6-8845-BD4E-CB4CCA059FC4}" type="datetimeFigureOut">
               <a:rPr lang="en-US" smtClean="0"/>
-              <a:t>8/7/26</a:t>
+              <a:t>8/8/26</a:t>
             </a:fld>
             <a:endParaRPr lang="en-US"/>
           </a:p>
@@ -3488,7 +3572,7 @@
           <a:p>
             <a:fld id="{5BCAD085-E8A6-8845-BD4E-CB4CCA059FC4}" type="datetimeFigureOut">
               <a:rPr lang="en-US" smtClean="0"/>
-              <a:t>8/7/26</a:t>
+              <a:t>8/8/26</a:t>
             </a:fld>
             <a:endParaRPr lang="en-US"/>
           </a:p>
@@ -3699,7 +3783,7 @@
           <a:p>
             <a:fld id="{5BCAD085-E8A6-8845-BD4E-CB4CCA059FC4}" type="datetimeFigureOut">
               <a:rPr lang="en-US" smtClean="0"/>
-              <a:t>8/7/26</a:t>
+              <a:t>8/8/26</a:t>
             </a:fld>
             <a:endParaRPr lang="en-US"/>
           </a:p>
@@ -6797,6 +6881,67 @@
 </file>
 
 <file path=ppt/slides/slide7.xml><?xml version="1.0" encoding="utf-8"?>
+<p:sld xmlns:a="http://schemas.openxmlformats.org/drawingml/2006/main" xmlns:r="http://schemas.openxmlformats.org/officeDocument/2006/relationships" xmlns:p="http://schemas.openxmlformats.org/presentationml/2006/main">
+  <p:cSld>
+    <p:spTree>
+      <p:nvGrpSpPr>
+        <p:cNvPr id="1" name=""/>
+        <p:cNvGrpSpPr/>
+        <p:nvPr/>
+      </p:nvGrpSpPr>
+      <p:grpSpPr>
+        <a:xfrm>
+          <a:off x="0" y="0"/>
+          <a:ext cx="0" cy="0"/>
+          <a:chOff x="0" y="0"/>
+          <a:chExt cx="0" cy="0"/>
+        </a:xfrm>
+      </p:grpSpPr>
+      <p:pic>
+        <p:nvPicPr>
+          <p:cNvPr id="4" name="Picture 3">
+            <a:hlinkClick r:id="rId3"/>
+            <a:extLst>
+              <a:ext uri="{FF2B5EF4-FFF2-40B4-BE49-F238E27FC236}">
+                <a16:creationId xmlns:a16="http://schemas.microsoft.com/office/drawing/2014/main" id="{3849D65C-8F9B-3FE0-BB72-D66FC0773ECA}"/>
+              </a:ext>
+            </a:extLst>
+          </p:cNvPr>
+          <p:cNvPicPr>
+            <a:picLocks noChangeAspect="1"/>
+          </p:cNvPicPr>
+          <p:nvPr/>
+        </p:nvPicPr>
+        <p:blipFill>
+          <a:blip r:embed="rId4"/>
+          <a:stretch>
+            <a:fillRect/>
+          </a:stretch>
+        </p:blipFill>
+        <p:spPr>
+          <a:xfrm>
+            <a:off x="0" y="-1060349"/>
+            <a:ext cx="12192000" cy="7918349"/>
+          </a:xfrm>
+          <a:prstGeom prst="rect">
+            <a:avLst/>
+          </a:prstGeom>
+        </p:spPr>
+      </p:pic>
+    </p:spTree>
+    <p:extLst>
+      <p:ext uri="{BB962C8B-B14F-4D97-AF65-F5344CB8AC3E}">
+        <p14:creationId xmlns:p14="http://schemas.microsoft.com/office/powerpoint/2010/main" val="2904630388"/>
+      </p:ext>
+    </p:extLst>
+  </p:cSld>
+  <p:clrMapOvr>
+    <a:masterClrMapping/>
+  </p:clrMapOvr>
+</p:sld>
+</file>
+
+<file path=ppt/slides/slide8.xml><?xml version="1.0" encoding="utf-8"?>
 <p:sld xmlns:a="http://schemas.openxmlformats.org/drawingml/2006/main" xmlns:r="http://schemas.openxmlformats.org/officeDocument/2006/relationships" xmlns:p="http://schemas.openxmlformats.org/presentationml/2006/main">
   <p:cSld>
     <p:bg>
